--- a/labs/100-linux-install/assets/Linux Install SUBMISSION TEMPLATE.pptx
+++ b/labs/100-linux-install/assets/Linux Install SUBMISSION TEMPLATE.pptx
@@ -6471,7 +6471,8 @@
           <a:lstStyle/>
           <a:p>
             <a:r>
-              <a:t>Screenshot 1</a:t>
+              <a:rPr sz="2200"/>
+              <a:t>Screenshot 1 Your completed Debian VM hardware profile.</a:t>
             </a:r>
           </a:p>
         </p:txBody>
@@ -6498,11 +6499,7 @@
             <a:normAutofit/>
           </a:bodyPr>
           <a:lstStyle/>
-          <a:p>
-            <a:r>
-              <a:t>Your completed Debian VM hardware profile.</a:t>
-            </a:r>
-          </a:p>
+          <a:p/>
         </p:txBody>
       </p:sp>
     </p:spTree>
@@ -6554,7 +6551,8 @@
           <a:lstStyle/>
           <a:p>
             <a:r>
-              <a:t>Screenshot 2</a:t>
+              <a:rPr sz="2000"/>
+              <a:t>Screenshot 2 lvdisplay | less showing lv-swap, lv-home, and lv-root.</a:t>
             </a:r>
           </a:p>
         </p:txBody>
@@ -6581,11 +6579,7 @@
             <a:normAutofit/>
           </a:bodyPr>
           <a:lstStyle/>
-          <a:p>
-            <a:r>
-              <a:t>lvdisplay | less showing lv-swap, lv-home, and lv-root.</a:t>
-            </a:r>
-          </a:p>
+          <a:p/>
         </p:txBody>
       </p:sp>
     </p:spTree>
